--- a/content/youtube/shorts/SHORT_LLM_01_rakuten.pptx
+++ b/content/youtube/shorts/SHORT_LLM_01_rakuten.pptx
@@ -1328,7 +1328,7 @@
         </p:nvSpPr>
         <p:spPr>
           <a:xfrm>
-            <a:off x="274320" y="2286000"/>
+            <a:off x="274320" y="1371600"/>
             <a:ext cx="3566160" cy="2286000"/>
           </a:xfrm>
           <a:prstGeom prst="rect">
@@ -1356,7 +1356,7 @@
                 <a:ea typeface="Hiragino Sans" pitchFamily="34" charset="-122"/>
                 <a:cs typeface="Hiragino Sans" pitchFamily="34" charset="-120"/>
               </a:rPr>
-              <a:t>楽天AI 3.0、</a:t>
+              <a:t>「楽天AIすごい！」</a:t>
             </a:r>
             <a:endParaRPr lang="en-US" sz="2400" dirty="0"/>
           </a:p>
@@ -1376,7 +1376,7 @@
                 <a:ea typeface="Hiragino Sans" pitchFamily="34" charset="-122"/>
                 <a:cs typeface="Hiragino Sans" pitchFamily="34" charset="-120"/>
               </a:rPr>
-              <a:t>日本語性能トップ。</a:t>
+              <a:t>って言ってる人、</a:t>
             </a:r>
             <a:endParaRPr lang="en-US" sz="2400" dirty="0"/>
           </a:p>
@@ -1396,7 +1396,7 @@
                 <a:ea typeface="Hiragino Sans" pitchFamily="34" charset="-122"/>
                 <a:cs typeface="Hiragino Sans" pitchFamily="34" charset="-120"/>
               </a:rPr>
-              <a:t>で、業務で使えるの？</a:t>
+              <a:t>使ったことある？</a:t>
             </a:r>
             <a:endParaRPr lang="en-US" sz="2400" dirty="0"/>
           </a:p>
@@ -1404,7 +1404,46 @@
       </p:sp>
       <p:sp>
         <p:nvSpPr>
-          <p:cNvPr id="3" name="Shape 1"/>
+          <p:cNvPr id="3" name="Text 1"/>
+          <p:cNvSpPr/>
+          <p:nvPr/>
+        </p:nvSpPr>
+        <p:spPr>
+          <a:xfrm>
+            <a:off x="274320" y="4114800"/>
+            <a:ext cx="3566160" cy="914400"/>
+          </a:xfrm>
+          <a:prstGeom prst="rect">
+            <a:avLst/>
+          </a:prstGeom>
+          <a:noFill/>
+          <a:ln/>
+        </p:spPr>
+        <p:txBody>
+          <a:bodyPr wrap="square" rtlCol="0" anchor="t"/>
+          <a:lstStyle/>
+          <a:p>
+            <a:pPr algn="l" indent="0" marL="0">
+              <a:buNone/>
+            </a:pPr>
+            <a:r>
+              <a:rPr lang="en-US" sz="1200" dirty="0">
+                <a:solidFill>
+                  <a:srgbClr val="57534E"/>
+                </a:solidFill>
+                <a:latin typeface="Hiragino Sans" pitchFamily="34" charset="0"/>
+                <a:ea typeface="Hiragino Sans" pitchFamily="34" charset="-122"/>
+                <a:cs typeface="Hiragino Sans" pitchFamily="34" charset="-120"/>
+              </a:rPr>
+              <a:t>日本語ベンチ1位のニュースが流れたけど…</a:t>
+            </a:r>
+            <a:endParaRPr lang="en-US" sz="1200" dirty="0"/>
+          </a:p>
+        </p:txBody>
+      </p:sp>
+      <p:sp>
+        <p:nvSpPr>
+          <p:cNvPr id="4" name="Shape 2"/>
           <p:cNvSpPr/>
           <p:nvPr/>
         </p:nvSpPr>
@@ -1424,7 +1463,7 @@
       </p:sp>
       <p:sp>
         <p:nvSpPr>
-          <p:cNvPr id="4" name="Text 2"/>
+          <p:cNvPr id="5" name="Text 3"/>
           <p:cNvSpPr/>
           <p:nvPr/>
         </p:nvSpPr>
@@ -1529,7 +1568,47 @@
                 <a:ea typeface="Hiragino Sans" pitchFamily="34" charset="-122"/>
                 <a:cs typeface="Hiragino Sans" pitchFamily="34" charset="-120"/>
               </a:rPr>
-              <a:t>確かにすごい</a:t>
+              <a:t>ベンチマーク1位。</a:t>
+            </a:r>
+            <a:endParaRPr lang="en-US" sz="2000" dirty="0"/>
+          </a:p>
+          <a:p>
+            <a:pPr algn="l" indent="0" marL="0">
+              <a:lnSpc>
+                <a:spcPct val="130000"/>
+              </a:lnSpc>
+              <a:buNone/>
+            </a:pPr>
+            <a:r>
+              <a:rPr lang="en-US" sz="2000" b="1" dirty="0">
+                <a:solidFill>
+                  <a:srgbClr val="FFFFFF"/>
+                </a:solidFill>
+                <a:latin typeface="Hiragino Sans" pitchFamily="34" charset="0"/>
+                <a:ea typeface="Hiragino Sans" pitchFamily="34" charset="-122"/>
+                <a:cs typeface="Hiragino Sans" pitchFamily="34" charset="-120"/>
+              </a:rPr>
+              <a:t>で、あなたの業務に</a:t>
+            </a:r>
+            <a:endParaRPr lang="en-US" sz="2000" dirty="0"/>
+          </a:p>
+          <a:p>
+            <a:pPr algn="l" indent="0" marL="0">
+              <a:lnSpc>
+                <a:spcPct val="130000"/>
+              </a:lnSpc>
+              <a:buNone/>
+            </a:pPr>
+            <a:r>
+              <a:rPr lang="en-US" sz="2000" b="1" dirty="0">
+                <a:solidFill>
+                  <a:srgbClr val="FFFFFF"/>
+                </a:solidFill>
+                <a:latin typeface="Hiragino Sans" pitchFamily="34" charset="0"/>
+                <a:ea typeface="Hiragino Sans" pitchFamily="34" charset="-122"/>
+                <a:cs typeface="Hiragino Sans" pitchFamily="34" charset="-120"/>
+              </a:rPr>
+              <a:t>入りますか？</a:t>
             </a:r>
             <a:endParaRPr lang="en-US" sz="2000" dirty="0"/>
           </a:p>
@@ -1543,8 +1622,8 @@
         </p:nvSpPr>
         <p:spPr>
           <a:xfrm>
-            <a:off x="274320" y="3657600"/>
-            <a:ext cx="3566160" cy="2286000"/>
+            <a:off x="274320" y="4114800"/>
+            <a:ext cx="3566160" cy="914400"/>
           </a:xfrm>
           <a:prstGeom prst="rect">
             <a:avLst/>
@@ -1556,67 +1635,21 @@
           <a:bodyPr wrap="square" rtlCol="0" anchor="t"/>
           <a:lstStyle/>
           <a:p>
-            <a:pPr marL="342900" indent="-342900">
-              <a:lnSpc>
-                <a:spcPct val="150000"/>
-              </a:lnSpc>
-              <a:buSzPct val="100000"/>
-              <a:buChar char="•"/>
+            <a:pPr algn="l" indent="0" marL="0">
+              <a:buNone/>
             </a:pPr>
             <a:r>
-              <a:rPr lang="en-US" sz="1400" dirty="0">
+              <a:rPr lang="en-US" sz="1200" dirty="0">
                 <a:solidFill>
-                  <a:srgbClr val="FAF8F5"/>
+                  <a:srgbClr val="57534E"/>
                 </a:solidFill>
                 <a:latin typeface="Hiragino Sans" pitchFamily="34" charset="0"/>
                 <a:ea typeface="Hiragino Sans" pitchFamily="34" charset="-122"/>
                 <a:cs typeface="Hiragino Sans" pitchFamily="34" charset="-120"/>
               </a:rPr>
-              <a:t>日本語MT-Bench 8.88（GPT-4o超え）</a:t>
-            </a:r>
-            <a:endParaRPr lang="en-US" sz="1400" dirty="0"/>
-          </a:p>
-          <a:p>
-            <a:pPr marL="342900" indent="-342900">
-              <a:lnSpc>
-                <a:spcPct val="150000"/>
-              </a:lnSpc>
-              <a:buSzPct val="100000"/>
-              <a:buChar char="•"/>
-            </a:pPr>
-            <a:r>
-              <a:rPr lang="en-US" sz="1400" dirty="0">
-                <a:solidFill>
-                  <a:srgbClr val="FAF8F5"/>
-                </a:solidFill>
-                <a:latin typeface="Hiragino Sans" pitchFamily="34" charset="0"/>
-                <a:ea typeface="Hiragino Sans" pitchFamily="34" charset="-122"/>
-                <a:cs typeface="Hiragino Sans" pitchFamily="34" charset="-120"/>
-              </a:rPr>
-              <a:t>700Bパラメータ（MoE）</a:t>
-            </a:r>
-            <a:endParaRPr lang="en-US" sz="1400" dirty="0"/>
-          </a:p>
-          <a:p>
-            <a:pPr marL="342900" indent="-342900">
-              <a:lnSpc>
-                <a:spcPct val="150000"/>
-              </a:lnSpc>
-              <a:buSzPct val="100000"/>
-              <a:buChar char="•"/>
-            </a:pPr>
-            <a:r>
-              <a:rPr lang="en-US" sz="1400" dirty="0">
-                <a:solidFill>
-                  <a:srgbClr val="FAF8F5"/>
-                </a:solidFill>
-                <a:latin typeface="Hiragino Sans" pitchFamily="34" charset="0"/>
-                <a:ea typeface="Hiragino Sans" pitchFamily="34" charset="-122"/>
-                <a:cs typeface="Hiragino Sans" pitchFamily="34" charset="-120"/>
-              </a:rPr>
-              <a:t>Apache 2.0（商用利用可能）</a:t>
-            </a:r>
-            <a:endParaRPr lang="en-US" sz="1400" dirty="0"/>
+              <a:t>APIがない。サーバー自前。GPU月額数百万円。</a:t>
+            </a:r>
+            <a:endParaRPr lang="en-US" sz="1200" dirty="0"/>
           </a:p>
         </p:txBody>
       </p:sp>
@@ -1719,7 +1752,7 @@
         </p:nvSpPr>
         <p:spPr>
           <a:xfrm>
-            <a:off x="274320" y="1371600"/>
+            <a:off x="274320" y="2286000"/>
             <a:ext cx="3566160" cy="2286000"/>
           </a:xfrm>
           <a:prstGeom prst="rect">
@@ -1739,7 +1772,7 @@
               <a:buNone/>
             </a:pPr>
             <a:r>
-              <a:rPr lang="en-US" sz="2000" b="1" dirty="0">
+              <a:rPr lang="en-US" sz="2800" b="1" dirty="0">
                 <a:solidFill>
                   <a:srgbClr val="FFFFFF"/>
                 </a:solidFill>
@@ -1747,100 +1780,55 @@
                 <a:ea typeface="Hiragino Sans" pitchFamily="34" charset="-122"/>
                 <a:cs typeface="Hiragino Sans" pitchFamily="34" charset="-120"/>
               </a:rPr>
-              <a:t>でも、APIがない</a:t>
-            </a:r>
-            <a:endParaRPr lang="en-US" sz="2000" dirty="0"/>
-          </a:p>
-        </p:txBody>
-      </p:sp>
-      <p:sp>
-        <p:nvSpPr>
-          <p:cNvPr id="3" name="Text 1"/>
-          <p:cNvSpPr/>
-          <p:nvPr/>
-        </p:nvSpPr>
-        <p:spPr>
-          <a:xfrm>
-            <a:off x="274320" y="3657600"/>
-            <a:ext cx="3566160" cy="2286000"/>
-          </a:xfrm>
-          <a:prstGeom prst="rect">
-            <a:avLst/>
-          </a:prstGeom>
-          <a:noFill/>
-          <a:ln/>
-        </p:spPr>
-        <p:txBody>
-          <a:bodyPr wrap="square" rtlCol="0" anchor="t"/>
-          <a:lstStyle/>
-          <a:p>
-            <a:pPr marL="342900" indent="-342900">
+              <a:t>「すごいAI」と</a:t>
+            </a:r>
+            <a:endParaRPr lang="en-US" sz="2800" dirty="0"/>
+          </a:p>
+          <a:p>
+            <a:pPr algn="l" indent="0" marL="0">
               <a:lnSpc>
-                <a:spcPct val="150000"/>
+                <a:spcPct val="130000"/>
               </a:lnSpc>
-              <a:buSzPct val="100000"/>
-              <a:buChar char="•"/>
+              <a:buNone/>
             </a:pPr>
             <a:r>
-              <a:rPr lang="en-US" sz="1400" dirty="0">
+              <a:rPr lang="en-US" sz="2800" b="1" dirty="0">
                 <a:solidFill>
-                  <a:srgbClr val="FAF8F5"/>
+                  <a:srgbClr val="FFFFFF"/>
                 </a:solidFill>
                 <a:latin typeface="Hiragino Sans" pitchFamily="34" charset="0"/>
                 <a:ea typeface="Hiragino Sans" pitchFamily="34" charset="-122"/>
                 <a:cs typeface="Hiragino Sans" pitchFamily="34" charset="-120"/>
               </a:rPr>
-              <a:t>公開APIなし（2026年3月）</a:t>
-            </a:r>
-            <a:endParaRPr lang="en-US" sz="1400" dirty="0"/>
-          </a:p>
-          <a:p>
-            <a:pPr marL="342900" indent="-342900">
+              <a:t>「使えるAI」は</a:t>
+            </a:r>
+            <a:endParaRPr lang="en-US" sz="2800" dirty="0"/>
+          </a:p>
+          <a:p>
+            <a:pPr algn="l" indent="0" marL="0">
               <a:lnSpc>
-                <a:spcPct val="150000"/>
+                <a:spcPct val="130000"/>
               </a:lnSpc>
-              <a:buSzPct val="100000"/>
-              <a:buChar char="•"/>
+              <a:buNone/>
             </a:pPr>
             <a:r>
-              <a:rPr lang="en-US" sz="1400" dirty="0">
+              <a:rPr lang="en-US" sz="2800" b="1" dirty="0">
                 <a:solidFill>
-                  <a:srgbClr val="FAF8F5"/>
+                  <a:srgbClr val="FFFFFF"/>
                 </a:solidFill>
                 <a:latin typeface="Hiragino Sans" pitchFamily="34" charset="0"/>
                 <a:ea typeface="Hiragino Sans" pitchFamily="34" charset="-122"/>
                 <a:cs typeface="Hiragino Sans" pitchFamily="34" charset="-120"/>
               </a:rPr>
-              <a:t>使うにはセルフホスト</a:t>
-            </a:r>
-            <a:endParaRPr lang="en-US" sz="1400" dirty="0"/>
-          </a:p>
-          <a:p>
-            <a:pPr marL="342900" indent="-342900">
-              <a:lnSpc>
-                <a:spcPct val="150000"/>
-              </a:lnSpc>
-              <a:buSzPct val="100000"/>
-              <a:buChar char="•"/>
-            </a:pPr>
-            <a:r>
-              <a:rPr lang="en-US" sz="1400" dirty="0">
-                <a:solidFill>
-                  <a:srgbClr val="FAF8F5"/>
-                </a:solidFill>
-                <a:latin typeface="Hiragino Sans" pitchFamily="34" charset="0"/>
-                <a:ea typeface="Hiragino Sans" pitchFamily="34" charset="-122"/>
-                <a:cs typeface="Hiragino Sans" pitchFamily="34" charset="-120"/>
-              </a:rPr>
-              <a:t>700B MoEのGPU代は？</a:t>
-            </a:r>
-            <a:endParaRPr lang="en-US" sz="1400" dirty="0"/>
-          </a:p>
-        </p:txBody>
-      </p:sp>
-      <p:sp>
-        <p:nvSpPr>
-          <p:cNvPr id="4" name="Shape 2"/>
+              <a:t>全く別の話</a:t>
+            </a:r>
+            <a:endParaRPr lang="en-US" sz="2800" dirty="0"/>
+          </a:p>
+        </p:txBody>
+      </p:sp>
+      <p:sp>
+        <p:nvSpPr>
+          <p:cNvPr id="3" name="Shape 1"/>
           <p:cNvSpPr/>
           <p:nvPr/>
         </p:nvSpPr>
@@ -1860,7 +1848,7 @@
       </p:sp>
       <p:sp>
         <p:nvSpPr>
-          <p:cNvPr id="5" name="Text 3"/>
+          <p:cNvPr id="4" name="Text 2"/>
           <p:cNvSpPr/>
           <p:nvPr/>
         </p:nvSpPr>
@@ -1965,7 +1953,47 @@
                 <a:ea typeface="Hiragino Sans" pitchFamily="34" charset="-122"/>
                 <a:cs typeface="Hiragino Sans" pitchFamily="34" charset="-120"/>
               </a:rPr>
-              <a:t>一方、Claude Sonnetは</a:t>
+              <a:t>フェラーリが</a:t>
+            </a:r>
+            <a:endParaRPr lang="en-US" sz="2000" dirty="0"/>
+          </a:p>
+          <a:p>
+            <a:pPr algn="l" indent="0" marL="0">
+              <a:lnSpc>
+                <a:spcPct val="130000"/>
+              </a:lnSpc>
+              <a:buNone/>
+            </a:pPr>
+            <a:r>
+              <a:rPr lang="en-US" sz="2000" b="1" dirty="0">
+                <a:solidFill>
+                  <a:srgbClr val="FFFFFF"/>
+                </a:solidFill>
+                <a:latin typeface="Hiragino Sans" pitchFamily="34" charset="0"/>
+                <a:ea typeface="Hiragino Sans" pitchFamily="34" charset="-122"/>
+                <a:cs typeface="Hiragino Sans" pitchFamily="34" charset="-120"/>
+              </a:rPr>
+              <a:t>最速でも、</a:t>
+            </a:r>
+            <a:endParaRPr lang="en-US" sz="2000" dirty="0"/>
+          </a:p>
+          <a:p>
+            <a:pPr algn="l" indent="0" marL="0">
+              <a:lnSpc>
+                <a:spcPct val="130000"/>
+              </a:lnSpc>
+              <a:buNone/>
+            </a:pPr>
+            <a:r>
+              <a:rPr lang="en-US" sz="2000" b="1" dirty="0">
+                <a:solidFill>
+                  <a:srgbClr val="FFFFFF"/>
+                </a:solidFill>
+                <a:latin typeface="Hiragino Sans" pitchFamily="34" charset="0"/>
+                <a:ea typeface="Hiragino Sans" pitchFamily="34" charset="-122"/>
+                <a:cs typeface="Hiragino Sans" pitchFamily="34" charset="-120"/>
+              </a:rPr>
+              <a:t>通勤には乗れない</a:t>
             </a:r>
             <a:endParaRPr lang="en-US" sz="2000" dirty="0"/>
           </a:p>
@@ -1979,8 +2007,8 @@
         </p:nvSpPr>
         <p:spPr>
           <a:xfrm>
-            <a:off x="274320" y="3657600"/>
-            <a:ext cx="3566160" cy="2286000"/>
+            <a:off x="274320" y="4114800"/>
+            <a:ext cx="3566160" cy="914400"/>
           </a:xfrm>
           <a:prstGeom prst="rect">
             <a:avLst/>
@@ -1992,88 +2020,21 @@
           <a:bodyPr wrap="square" rtlCol="0" anchor="t"/>
           <a:lstStyle/>
           <a:p>
-            <a:pPr marL="342900" indent="-342900">
-              <a:lnSpc>
-                <a:spcPct val="150000"/>
-              </a:lnSpc>
-              <a:buSzPct val="100000"/>
-              <a:buChar char="•"/>
+            <a:pPr algn="l" indent="0" marL="0">
+              <a:buNone/>
             </a:pPr>
             <a:r>
-              <a:rPr lang="en-US" sz="1400" dirty="0">
+              <a:rPr lang="en-US" sz="1200" dirty="0">
                 <a:solidFill>
-                  <a:srgbClr val="FAF8F5"/>
+                  <a:srgbClr val="57534E"/>
                 </a:solidFill>
                 <a:latin typeface="Hiragino Sans" pitchFamily="34" charset="0"/>
                 <a:ea typeface="Hiragino Sans" pitchFamily="34" charset="-122"/>
                 <a:cs typeface="Hiragino Sans" pitchFamily="34" charset="-120"/>
               </a:rPr>
-              <a:t>API即使用可能</a:t>
-            </a:r>
-            <a:endParaRPr lang="en-US" sz="1400" dirty="0"/>
-          </a:p>
-          <a:p>
-            <a:pPr marL="342900" indent="-342900">
-              <a:lnSpc>
-                <a:spcPct val="150000"/>
-              </a:lnSpc>
-              <a:buSzPct val="100000"/>
-              <a:buChar char="•"/>
-            </a:pPr>
-            <a:r>
-              <a:rPr lang="en-US" sz="1400" dirty="0">
-                <a:solidFill>
-                  <a:srgbClr val="FAF8F5"/>
-                </a:solidFill>
-                <a:latin typeface="Hiragino Sans" pitchFamily="34" charset="0"/>
-                <a:ea typeface="Hiragino Sans" pitchFamily="34" charset="-122"/>
-                <a:cs typeface="Hiragino Sans" pitchFamily="34" charset="-120"/>
-              </a:rPr>
-              <a:t>$3.00/100万トークン</a:t>
-            </a:r>
-            <a:endParaRPr lang="en-US" sz="1400" dirty="0"/>
-          </a:p>
-          <a:p>
-            <a:pPr marL="342900" indent="-342900">
-              <a:lnSpc>
-                <a:spcPct val="150000"/>
-              </a:lnSpc>
-              <a:buSzPct val="100000"/>
-              <a:buChar char="•"/>
-            </a:pPr>
-            <a:r>
-              <a:rPr lang="en-US" sz="1400" dirty="0">
-                <a:solidFill>
-                  <a:srgbClr val="FAF8F5"/>
-                </a:solidFill>
-                <a:latin typeface="Hiragino Sans" pitchFamily="34" charset="0"/>
-                <a:ea typeface="Hiragino Sans" pitchFamily="34" charset="-122"/>
-                <a:cs typeface="Hiragino Sans" pitchFamily="34" charset="-120"/>
-              </a:rPr>
-              <a:t>1Mコンテキスト</a:t>
-            </a:r>
-            <a:endParaRPr lang="en-US" sz="1400" dirty="0"/>
-          </a:p>
-          <a:p>
-            <a:pPr marL="342900" indent="-342900">
-              <a:lnSpc>
-                <a:spcPct val="150000"/>
-              </a:lnSpc>
-              <a:buSzPct val="100000"/>
-              <a:buChar char="•"/>
-            </a:pPr>
-            <a:r>
-              <a:rPr lang="en-US" sz="1400" dirty="0">
-                <a:solidFill>
-                  <a:srgbClr val="FAF8F5"/>
-                </a:solidFill>
-                <a:latin typeface="Hiragino Sans" pitchFamily="34" charset="0"/>
-                <a:ea typeface="Hiragino Sans" pitchFamily="34" charset="-122"/>
-                <a:cs typeface="Hiragino Sans" pitchFamily="34" charset="-120"/>
-              </a:rPr>
-              <a:t>今すぐ業務に入る</a:t>
-            </a:r>
-            <a:endParaRPr lang="en-US" sz="1400" dirty="0"/>
+              <a:t>業務に必要なのは「今日から動く」こと</a:t>
+            </a:r>
+            <a:endParaRPr lang="en-US" sz="1200" dirty="0"/>
           </a:p>
         </p:txBody>
       </p:sp>
@@ -2176,7 +2137,7 @@
         </p:nvSpPr>
         <p:spPr>
           <a:xfrm>
-            <a:off x="274320" y="1371600"/>
+            <a:off x="274320" y="2286000"/>
             <a:ext cx="3566160" cy="2286000"/>
           </a:xfrm>
           <a:prstGeom prst="rect">
@@ -2204,7 +2165,7 @@
                 <a:ea typeface="Hiragino Sans" pitchFamily="34" charset="-122"/>
                 <a:cs typeface="Hiragino Sans" pitchFamily="34" charset="-120"/>
               </a:rPr>
-              <a:t>性能が高い</a:t>
+              <a:t>ベンチマークで</a:t>
             </a:r>
             <a:endParaRPr lang="en-US" sz="2800" dirty="0"/>
           </a:p>
@@ -2224,7 +2185,7 @@
                 <a:ea typeface="Hiragino Sans" pitchFamily="34" charset="-122"/>
                 <a:cs typeface="Hiragino Sans" pitchFamily="34" charset="-120"/>
               </a:rPr>
-              <a:t>≠</a:t>
+              <a:t>AIを選ぶ会社は、</a:t>
             </a:r>
             <a:endParaRPr lang="en-US" sz="2800" dirty="0"/>
           </a:p>
@@ -2244,71 +2205,35 @@
                 <a:ea typeface="Hiragino Sans" pitchFamily="34" charset="-122"/>
                 <a:cs typeface="Hiragino Sans" pitchFamily="34" charset="-120"/>
               </a:rPr>
-              <a:t>業務で使える</a:t>
+              <a:t>カタログスペックで</a:t>
             </a:r>
             <a:endParaRPr lang="en-US" sz="2800" dirty="0"/>
           </a:p>
-        </p:txBody>
-      </p:sp>
-      <p:sp>
-        <p:nvSpPr>
-          <p:cNvPr id="3" name="Text 1"/>
-          <p:cNvSpPr/>
-          <p:nvPr/>
-        </p:nvSpPr>
-        <p:spPr>
-          <a:xfrm>
-            <a:off x="274320" y="4114800"/>
-            <a:ext cx="3566160" cy="914400"/>
-          </a:xfrm>
-          <a:prstGeom prst="rect">
-            <a:avLst/>
-          </a:prstGeom>
-          <a:noFill/>
-          <a:ln/>
-        </p:spPr>
-        <p:txBody>
-          <a:bodyPr wrap="square" rtlCol="0" anchor="t"/>
-          <a:lstStyle/>
           <a:p>
             <a:pPr algn="l" indent="0" marL="0">
+              <a:lnSpc>
+                <a:spcPct val="130000"/>
+              </a:lnSpc>
               <a:buNone/>
             </a:pPr>
             <a:r>
-              <a:rPr lang="en-US" sz="1200" dirty="0">
+              <a:rPr lang="en-US" sz="2800" b="1" dirty="0">
                 <a:solidFill>
-                  <a:srgbClr val="57534E"/>
+                  <a:srgbClr val="FFFFFF"/>
                 </a:solidFill>
                 <a:latin typeface="Hiragino Sans" pitchFamily="34" charset="0"/>
                 <a:ea typeface="Hiragino Sans" pitchFamily="34" charset="-122"/>
                 <a:cs typeface="Hiragino Sans" pitchFamily="34" charset="-120"/>
               </a:rPr>
-              <a:t>必要なのはベンチマークではなく</a:t>
-            </a:r>
-            <a:endParaRPr lang="en-US" sz="1200" dirty="0"/>
-          </a:p>
-          <a:p>
-            <a:pPr algn="l" indent="0" marL="0">
-              <a:buNone/>
-            </a:pPr>
-            <a:r>
-              <a:rPr lang="en-US" sz="1200" dirty="0">
-                <a:solidFill>
-                  <a:srgbClr val="57534E"/>
-                </a:solidFill>
-                <a:latin typeface="Hiragino Sans" pitchFamily="34" charset="0"/>
-                <a:ea typeface="Hiragino Sans" pitchFamily="34" charset="-122"/>
-                <a:cs typeface="Hiragino Sans" pitchFamily="34" charset="-120"/>
-              </a:rPr>
-              <a:t>明日から使えるかどうか</a:t>
-            </a:r>
-            <a:endParaRPr lang="en-US" sz="1200" dirty="0"/>
-          </a:p>
-        </p:txBody>
-      </p:sp>
-      <p:sp>
-        <p:nvSpPr>
-          <p:cNvPr id="4" name="Shape 2"/>
+              <a:t>車を買う人と同じ</a:t>
+            </a:r>
+            <a:endParaRPr lang="en-US" sz="2800" dirty="0"/>
+          </a:p>
+        </p:txBody>
+      </p:sp>
+      <p:sp>
+        <p:nvSpPr>
+          <p:cNvPr id="3" name="Shape 1"/>
           <p:cNvSpPr/>
           <p:nvPr/>
         </p:nvSpPr>
@@ -2328,7 +2253,7 @@
       </p:sp>
       <p:sp>
         <p:nvSpPr>
-          <p:cNvPr id="5" name="Text 3"/>
+          <p:cNvPr id="4" name="Text 2"/>
           <p:cNvSpPr/>
           <p:nvPr/>
         </p:nvSpPr>
@@ -2433,7 +2358,7 @@
                 <a:ea typeface="Hiragino Sans" pitchFamily="34" charset="-122"/>
                 <a:cs typeface="Hiragino Sans" pitchFamily="34" charset="-120"/>
               </a:rPr>
-              <a:t>次回：</a:t>
+              <a:t>AIを選ぶ前に、</a:t>
             </a:r>
             <a:endParaRPr lang="en-US" sz="2000" dirty="0"/>
           </a:p>
@@ -2453,7 +2378,7 @@
                 <a:ea typeface="Hiragino Sans" pitchFamily="34" charset="-122"/>
                 <a:cs typeface="Hiragino Sans" pitchFamily="34" charset="-120"/>
               </a:rPr>
-              <a:t>RAGを入れた会社の本音</a:t>
+              <a:t>業務を設計しろ</a:t>
             </a:r>
             <a:endParaRPr lang="en-US" sz="2000" dirty="0"/>
           </a:p>
@@ -2479,23 +2404,6 @@
         <p:txBody>
           <a:bodyPr wrap="square" rtlCol="0" anchor="t"/>
           <a:lstStyle/>
-          <a:p>
-            <a:pPr algn="l" indent="0" marL="0">
-              <a:buNone/>
-            </a:pPr>
-            <a:r>
-              <a:rPr lang="en-US" sz="1200" dirty="0">
-                <a:solidFill>
-                  <a:srgbClr val="57534E"/>
-                </a:solidFill>
-                <a:latin typeface="Hiragino Sans" pitchFamily="34" charset="0"/>
-                <a:ea typeface="Hiragino Sans" pitchFamily="34" charset="-122"/>
-                <a:cs typeface="Hiragino Sans" pitchFamily="34" charset="-120"/>
-              </a:rPr>
-              <a:t>この動画はPowerPointからInsight Training Studioで自動生成しています</a:t>
-            </a:r>
-            <a:endParaRPr lang="en-US" sz="1200" dirty="0"/>
-          </a:p>
           <a:p>
             <a:pPr algn="l" indent="0" marL="0">
               <a:buNone/>
